--- a/atelier/atelier-f07-meet-designer.pptx
+++ b/atelier/atelier-f07-meet-designer.pptx
@@ -3360,7 +3360,7 @@
         </p:nvSpPr>
         <p:spPr>
           <a:xfrm>
-            <a:off x="666750" y="6210598"/>
+            <a:off x="666750" y="6132165"/>
             <a:ext cx="5097810" cy="9525"/>
           </a:xfrm>
           <a:prstGeom prst="rect">
@@ -3640,7 +3640,7 @@
         </p:nvSpPr>
         <p:spPr>
           <a:xfrm>
-            <a:off x="666750" y="3800177"/>
+            <a:off x="666750" y="3878461"/>
             <a:ext cx="8537496" cy="133350"/>
           </a:xfrm>
           <a:prstGeom prst="rect">
@@ -3675,8 +3675,8 @@
         </p:nvSpPr>
         <p:spPr>
           <a:xfrm>
-            <a:off x="666750" y="4066877"/>
-            <a:ext cx="8537496" cy="752475"/>
+            <a:off x="666750" y="4145161"/>
+            <a:ext cx="8537496" cy="595759"/>
           </a:xfrm>
           <a:prstGeom prst="rect">
             <a:avLst/>
@@ -3687,7 +3687,11 @@
           <a:bodyPr wrap="none" anchor="t" lIns="0" rIns="0" tIns="0" bIns="0"/>
           <a:lstStyle/>
           <a:p>
-            <a:pPr algn="l"/>
+            <a:pPr algn="l">
+              <a:lnSpc>
+                <a:spcPct val="92000"/>
+              </a:lnSpc>
+            </a:pPr>
             <a:r>
               <a:rPr sz="5100" i="1" b="0">
                 <a:solidFill>
@@ -3710,7 +3714,7 @@
         </p:nvSpPr>
         <p:spPr>
           <a:xfrm>
-            <a:off x="666750" y="4952702"/>
+            <a:off x="666750" y="4874270"/>
             <a:ext cx="8537496" cy="104775"/>
           </a:xfrm>
           <a:prstGeom prst="rect">
@@ -3745,7 +3749,7 @@
         </p:nvSpPr>
         <p:spPr>
           <a:xfrm>
-            <a:off x="666750" y="5286077"/>
+            <a:off x="666750" y="5207645"/>
             <a:ext cx="5097810" cy="676870"/>
           </a:xfrm>
           <a:prstGeom prst="rect">
@@ -3784,7 +3788,7 @@
         </p:nvSpPr>
         <p:spPr>
           <a:xfrm>
-            <a:off x="666750" y="6391573"/>
+            <a:off x="666750" y="6313140"/>
             <a:ext cx="3099673" cy="104775"/>
           </a:xfrm>
           <a:prstGeom prst="rect">
@@ -3819,7 +3823,7 @@
         </p:nvSpPr>
         <p:spPr>
           <a:xfrm>
-            <a:off x="666750" y="6553498"/>
+            <a:off x="666750" y="6475065"/>
             <a:ext cx="3099673" cy="142875"/>
           </a:xfrm>
           <a:prstGeom prst="rect">
@@ -3854,7 +3858,7 @@
         </p:nvSpPr>
         <p:spPr>
           <a:xfrm>
-            <a:off x="2365921" y="6391573"/>
+            <a:off x="2365921" y="6313140"/>
             <a:ext cx="3099911" cy="104775"/>
           </a:xfrm>
           <a:prstGeom prst="rect">
@@ -3889,7 +3893,7 @@
         </p:nvSpPr>
         <p:spPr>
           <a:xfrm>
-            <a:off x="2365921" y="6553498"/>
+            <a:off x="2365921" y="6475065"/>
             <a:ext cx="3099911" cy="142875"/>
           </a:xfrm>
           <a:prstGeom prst="rect">
@@ -3924,7 +3928,7 @@
         </p:nvSpPr>
         <p:spPr>
           <a:xfrm>
-            <a:off x="4065240" y="6391573"/>
+            <a:off x="4065240" y="6313140"/>
             <a:ext cx="3099911" cy="104775"/>
           </a:xfrm>
           <a:prstGeom prst="rect">
@@ -3959,7 +3963,7 @@
         </p:nvSpPr>
         <p:spPr>
           <a:xfrm>
-            <a:off x="4065240" y="6553498"/>
+            <a:off x="4065240" y="6475065"/>
             <a:ext cx="3099911" cy="142875"/>
           </a:xfrm>
           <a:prstGeom prst="rect">
